--- a/assets/Manuscripts/L1715_Sim17_Instructor Slides.pptx
+++ b/assets/Manuscripts/L1715_Sim17_Instructor Slides.pptx
@@ -263,7 +263,7 @@
           <a:p>
             <a:fld id="{9389D1CC-DA6D-B540-B3AB-1D3F7252007E}" type="datetimeFigureOut">
               <a:rPr lang="en-US" smtClean="0"/>
-              <a:t>8/11/2026</a:t>
+              <a:t>8/14/2026</a:t>
             </a:fld>
             <a:endParaRPr lang="en-US" dirty="0"/>
           </a:p>
@@ -845,8 +845,8 @@
           </a:p>
         </p:txBody>
       </p:sp>
-      <mc:AlternateContent xmlns:mc="http://schemas.openxmlformats.org/markup-compatibility/2006" xmlns:a14="http://schemas.microsoft.com/office/drawing/2010/main">
-        <mc:Choice Requires="a14">
+      <mc:AlternateContent xmlns:mc="http://schemas.openxmlformats.org/markup-compatibility/2006">
+        <mc:Choice xmlns:a14="http://schemas.microsoft.com/office/drawing/2010/main" Requires="a14">
           <p:sp>
             <p:nvSpPr>
               <p:cNvPr id="3" name="Notes Placeholder 2"/>
@@ -1039,106 +1039,10 @@
                 </a:r>
                 <a:endParaRPr lang="en-US" dirty="0"/>
               </a:p>
-              <a:p>
-                <a:endParaRPr lang="en-US" sz="1200" b="0" i="0" kern="1200" dirty="0">
-                  <a:solidFill>
-                    <a:schemeClr val="tx1"/>
-                  </a:solidFill>
-                  <a:effectLst/>
-                  <a:latin typeface="+mn-lt"/>
-                  <a:ea typeface="+mn-ea"/>
-                  <a:cs typeface="+mn-cs"/>
-                </a:endParaRPr>
-              </a:p>
-              <a:p>
-                <a:pPr marL="0" marR="0" lvl="0" indent="0" algn="l" defTabSz="914400" rtl="0" eaLnBrk="1" fontAlgn="auto" latinLnBrk="0" hangingPunct="1">
-                  <a:lnSpc>
-                    <a:spcPct val="100000"/>
-                  </a:lnSpc>
-                  <a:spcBef>
-                    <a:spcPts val="0"/>
-                  </a:spcBef>
-                  <a:spcAft>
-                    <a:spcPts val="0"/>
-                  </a:spcAft>
-                  <a:buClrTx/>
-                  <a:buSzTx/>
-                  <a:buFontTx/>
-                  <a:buNone/>
-                  <a:tabLst/>
-                  <a:defRPr/>
-                </a:pPr>
-                <a:r>
-                  <a:rPr lang="en-US" dirty="0">
-                    <a:effectLst/>
-                  </a:rPr>
-                  <a:t>Data from Gupta Y, Mahara D, Lamichhane, A</a:t>
-                </a:r>
-                <a:r>
-                  <a:rPr lang="en-US" b="0" dirty="0">
-                    <a:solidFill>
-                      <a:schemeClr val="tx1"/>
-                    </a:solidFill>
-                    <a:effectLst/>
-                  </a:rPr>
-                  <a:t>. </a:t>
-                </a:r>
-                <a:r>
-                  <a:rPr lang="en-US" sz="1200" b="0" kern="1200" dirty="0">
-                    <a:solidFill>
-                      <a:schemeClr val="tx1"/>
-                    </a:solidFill>
-                    <a:effectLst/>
-                    <a:latin typeface="+mn-lt"/>
-                    <a:ea typeface="+mn-ea"/>
-                    <a:cs typeface="+mn-cs"/>
-                  </a:rPr>
-                  <a:t>McMurray's Test and joint line tenderness for medial meniscus tear: Are they accurate? </a:t>
-                </a:r>
-                <a:r>
-                  <a:rPr lang="en-US" i="1" dirty="0">
-                    <a:effectLst/>
-                  </a:rPr>
-                  <a:t>Ethiop J Health Sci. </a:t>
-                </a:r>
-                <a:r>
-                  <a:rPr lang="en-US" dirty="0">
-                    <a:effectLst/>
-                  </a:rPr>
-                  <a:t>2016 Nov;26(6):567–572. doi: </a:t>
-                </a:r>
-                <a:r>
-                  <a:rPr lang="en-US" sz="1200" u="sng" kern="1200" dirty="0">
-                    <a:solidFill>
-                      <a:schemeClr val="tx1"/>
-                    </a:solidFill>
-                    <a:effectLst/>
-                    <a:latin typeface="+mn-lt"/>
-                    <a:ea typeface="+mn-ea"/>
-                    <a:cs typeface="+mn-cs"/>
-                    <a:hlinkClick r:id="rId3"/>
-                  </a:rPr>
-                  <a:t>10.4314/ejhs.v26i6.10</a:t>
-                </a:r>
-                <a:endParaRPr lang="en-US" dirty="0">
-                  <a:effectLst/>
-                </a:endParaRPr>
-              </a:p>
-              <a:p>
-                <a:endParaRPr lang="en-US" sz="1200" b="0" i="0" kern="1200" dirty="0">
-                  <a:solidFill>
-                    <a:schemeClr val="tx1"/>
-                  </a:solidFill>
-                  <a:effectLst/>
-                  <a:latin typeface="+mn-lt"/>
-                  <a:ea typeface="+mn-ea"/>
-                  <a:cs typeface="+mn-cs"/>
-                </a:endParaRPr>
-              </a:p>
             </p:txBody>
           </p:sp>
         </mc:Choice>
-        <mc:Fallback xmlns="">
+        <mc:Fallback>
           <p:sp>
             <p:nvSpPr>
               <p:cNvPr id="3" name="Notes Placeholder 2"/>
@@ -1192,7 +1096,7 @@
                     <a:solidFill>
                       <a:schemeClr val="tx1"/>
                     </a:solidFill>
-                    <a:latin typeface="+mn-lt"/>
+                    <a:latin typeface="Cambria Math" panose="02040503050406030204" pitchFamily="18" charset="0"/>
                     <a:ea typeface="+mn-ea"/>
                     <a:cs typeface="+mn-cs"/>
                   </a:rPr>
@@ -1210,14 +1114,14 @@
               <a:p>
                 <a:r>
                   <a:rPr lang="en-US" b="1" dirty="0"/>
-                  <a:t>FN = 46</a:t>
+                  <a:t>FN = 21</a:t>
                 </a:r>
                 <a:endParaRPr lang="en-US" dirty="0"/>
               </a:p>
               <a:p>
                 <a:r>
                   <a:rPr lang="en-US" b="1" dirty="0"/>
-                  <a:t>Specificity 79%</a:t>
+                  <a:t>Specificity 72%</a:t>
                 </a:r>
               </a:p>
               <a:p>
@@ -1230,7 +1134,7 @@
                     <a:solidFill>
                       <a:schemeClr val="tx1"/>
                     </a:solidFill>
-                    <a:latin typeface="+mn-lt"/>
+                    <a:latin typeface="Cambria Math" panose="02040503050406030204" pitchFamily="18" charset="0"/>
                     <a:ea typeface="+mn-ea"/>
                     <a:cs typeface="+mn-cs"/>
                   </a:rPr>
@@ -1241,301 +1145,20 @@
               <a:p>
                 <a:r>
                   <a:rPr lang="en-US" b="1" dirty="0"/>
-                  <a:t>TN = 79</a:t>
-                </a:r>
-                <a:endParaRPr lang="en-US" dirty="0"/>
-              </a:p>
-              <a:p>
-                <a:endParaRPr lang="en-US" sz="1200" b="0" i="0" kern="1200" dirty="0">
-                  <a:solidFill>
-                    <a:schemeClr val="tx1"/>
-                  </a:solidFill>
-                  <a:effectLst/>
-                  <a:latin typeface="+mn-lt"/>
-                  <a:ea typeface="+mn-ea"/>
-                  <a:cs typeface="+mn-cs"/>
-                </a:endParaRPr>
-              </a:p>
-              <a:p>
-                <a:endParaRPr lang="en-US" sz="1200" b="0" i="0" kern="1200" dirty="0">
-                  <a:solidFill>
-                    <a:schemeClr val="tx1"/>
-                  </a:solidFill>
-                  <a:effectLst/>
-                  <a:latin typeface="+mn-lt"/>
-                  <a:ea typeface="+mn-ea"/>
-                  <a:cs typeface="+mn-cs"/>
-                </a:endParaRPr>
-              </a:p>
-              <a:p>
-                <a:r>
-                  <a:rPr lang="en-US" dirty="0">
-                    <a:effectLst/>
-                  </a:rPr>
-                  <a:t>Ethiop J Health Sci</a:t>
+                  <a:t>TN = 79 </a:t>
                 </a:r>
               </a:p>
               <a:p>
                 <a:r>
-                  <a:rPr lang="en-US" dirty="0">
-                    <a:effectLst/>
-                  </a:rPr>
-                  <a:t>. 2016 Nov;26(6):567–572. </a:t>
-                </a:r>
-                <a:r>
-                  <a:rPr lang="en-US" dirty="0" err="1">
-                    <a:effectLst/>
-                  </a:rPr>
-                  <a:t>doi</a:t>
-                </a:r>
-                <a:r>
-                  <a:rPr lang="en-US" dirty="0">
-                    <a:effectLst/>
-                  </a:rPr>
-                  <a:t>: </a:t>
-                </a:r>
-                <a:r>
-                  <a:rPr lang="en-US" sz="1200" u="sng" kern="1200" dirty="0">
-                    <a:solidFill>
-                      <a:schemeClr val="tx1"/>
-                    </a:solidFill>
-                    <a:effectLst/>
-                    <a:latin typeface="+mn-lt"/>
-                    <a:ea typeface="+mn-ea"/>
-                    <a:cs typeface="+mn-cs"/>
-                    <a:hlinkClick r:id="rId7"/>
-                  </a:rPr>
-                  <a:t>10.4314/ejhs.v26i6.10</a:t>
-                </a:r>
-                <a:endParaRPr lang="en-US" dirty="0">
-                  <a:effectLst/>
-                </a:endParaRPr>
-              </a:p>
-              <a:p>
-                <a:r>
-                  <a:rPr lang="en-US" sz="1200" b="1" kern="1200" dirty="0">
-                    <a:solidFill>
-                      <a:schemeClr val="tx1"/>
-                    </a:solidFill>
-                    <a:effectLst/>
-                    <a:latin typeface="+mn-lt"/>
-                    <a:ea typeface="+mn-ea"/>
-                    <a:cs typeface="+mn-cs"/>
-                  </a:rPr>
-                  <a:t>McMurray's Test and Joint Line Tenderness for Medial Meniscus Tear: Are They Accurate?</a:t>
+                  <a:rPr lang="en-US" b="1" dirty="0"/>
+                  <a:t>FP = 46</a:t>
                 </a:r>
               </a:p>
               <a:p>
                 <a:r>
-                  <a:rPr lang="en-US" sz="1200" u="sng" kern="1200" dirty="0">
-                    <a:solidFill>
-                      <a:schemeClr val="tx1"/>
-                    </a:solidFill>
-                    <a:effectLst/>
-                    <a:latin typeface="+mn-lt"/>
-                    <a:ea typeface="+mn-ea"/>
-                    <a:cs typeface="+mn-cs"/>
-                    <a:hlinkClick r:id="rId8"/>
-                  </a:rPr>
-                  <a:t>Yogendra Gupta</a:t>
+                  <a:rPr lang="en-US" b="1" dirty="0"/>
+                  <a:t>Specificity 63%</a:t>
                 </a:r>
-                <a:r>
-                  <a:rPr lang="en-US" sz="1200" kern="1200" dirty="0">
-                    <a:solidFill>
-                      <a:schemeClr val="tx1"/>
-                    </a:solidFill>
-                    <a:effectLst/>
-                    <a:latin typeface="+mn-lt"/>
-                    <a:ea typeface="+mn-ea"/>
-                    <a:cs typeface="+mn-cs"/>
-                  </a:rPr>
-                  <a:t> </a:t>
-                </a:r>
-                <a:r>
-                  <a:rPr lang="en-US" sz="1200" kern="1200" baseline="30000" dirty="0">
-                    <a:solidFill>
-                      <a:schemeClr val="tx1"/>
-                    </a:solidFill>
-                    <a:effectLst/>
-                    <a:latin typeface="+mn-lt"/>
-                    <a:ea typeface="+mn-ea"/>
-                    <a:cs typeface="+mn-cs"/>
-                  </a:rPr>
-                  <a:t>1</a:t>
-                </a:r>
-                <a:r>
-                  <a:rPr lang="en-US" sz="1200" kern="1200" dirty="0">
-                    <a:solidFill>
-                      <a:schemeClr val="tx1"/>
-                    </a:solidFill>
-                    <a:effectLst/>
-                    <a:latin typeface="+mn-lt"/>
-                    <a:ea typeface="+mn-ea"/>
-                    <a:cs typeface="+mn-cs"/>
-                  </a:rPr>
-                  <a:t>, </a:t>
-                </a:r>
-                <a:r>
-                  <a:rPr lang="en-US" sz="1200" u="sng" kern="1200" dirty="0">
-                    <a:solidFill>
-                      <a:schemeClr val="tx1"/>
-                    </a:solidFill>
-                    <a:effectLst/>
-                    <a:latin typeface="+mn-lt"/>
-                    <a:ea typeface="+mn-ea"/>
-                    <a:cs typeface="+mn-cs"/>
-                    <a:hlinkClick r:id="rId9"/>
-                  </a:rPr>
-                  <a:t>Deepak Mahara</a:t>
-                </a:r>
-                <a:r>
-                  <a:rPr lang="en-US" sz="1200" kern="1200" dirty="0">
-                    <a:solidFill>
-                      <a:schemeClr val="tx1"/>
-                    </a:solidFill>
-                    <a:effectLst/>
-                    <a:latin typeface="+mn-lt"/>
-                    <a:ea typeface="+mn-ea"/>
-                    <a:cs typeface="+mn-cs"/>
-                  </a:rPr>
-                  <a:t> </a:t>
-                </a:r>
-                <a:r>
-                  <a:rPr lang="en-US" sz="1200" kern="1200" baseline="30000" dirty="0">
-                    <a:solidFill>
-                      <a:schemeClr val="tx1"/>
-                    </a:solidFill>
-                    <a:effectLst/>
-                    <a:latin typeface="+mn-lt"/>
-                    <a:ea typeface="+mn-ea"/>
-                    <a:cs typeface="+mn-cs"/>
-                  </a:rPr>
-                  <a:t>2</a:t>
-                </a:r>
-                <a:r>
-                  <a:rPr lang="en-US" sz="1200" kern="1200" dirty="0">
-                    <a:solidFill>
-                      <a:schemeClr val="tx1"/>
-                    </a:solidFill>
-                    <a:effectLst/>
-                    <a:latin typeface="+mn-lt"/>
-                    <a:ea typeface="+mn-ea"/>
-                    <a:cs typeface="+mn-cs"/>
-                  </a:rPr>
-                  <a:t>, </a:t>
-                </a:r>
-                <a:r>
-                  <a:rPr lang="en-US" sz="1200" u="sng" kern="1200" dirty="0">
-                    <a:solidFill>
-                      <a:schemeClr val="tx1"/>
-                    </a:solidFill>
-                    <a:effectLst/>
-                    <a:latin typeface="+mn-lt"/>
-                    <a:ea typeface="+mn-ea"/>
-                    <a:cs typeface="+mn-cs"/>
-                    <a:hlinkClick r:id="rId10"/>
-                  </a:rPr>
-                  <a:t>Arjun Lamichhane</a:t>
-                </a:r>
-                <a:r>
-                  <a:rPr lang="en-US" sz="1200" kern="1200" dirty="0">
-                    <a:solidFill>
-                      <a:schemeClr val="tx1"/>
-                    </a:solidFill>
-                    <a:effectLst/>
-                    <a:latin typeface="+mn-lt"/>
-                    <a:ea typeface="+mn-ea"/>
-                    <a:cs typeface="+mn-cs"/>
-                  </a:rPr>
-                  <a:t> </a:t>
-                </a:r>
-                <a:r>
-                  <a:rPr lang="en-US" sz="1200" kern="1200" baseline="30000" dirty="0">
-                    <a:solidFill>
-                      <a:schemeClr val="tx1"/>
-                    </a:solidFill>
-                    <a:effectLst/>
-                    <a:latin typeface="+mn-lt"/>
-                    <a:ea typeface="+mn-ea"/>
-                    <a:cs typeface="+mn-cs"/>
-                  </a:rPr>
-                  <a:t>2</a:t>
-                </a:r>
-                <a:endParaRPr lang="en-US" sz="1200" kern="1200" dirty="0">
-                  <a:solidFill>
-                    <a:schemeClr val="tx1"/>
-                  </a:solidFill>
-                  <a:effectLst/>
-                  <a:latin typeface="+mn-lt"/>
-                  <a:ea typeface="+mn-ea"/>
-                  <a:cs typeface="+mn-cs"/>
-                </a:endParaRPr>
-              </a:p>
-              <a:p>
-                <a:r>
-                  <a:rPr lang="en-US" sz="1200" kern="1200" dirty="0">
-                    <a:solidFill>
-                      <a:schemeClr val="tx1"/>
-                    </a:solidFill>
-                    <a:effectLst/>
-                    <a:latin typeface="+mn-lt"/>
-                    <a:ea typeface="+mn-ea"/>
-                    <a:cs typeface="+mn-cs"/>
-                  </a:rPr>
-                  <a:t>Author information</a:t>
-                </a:r>
-              </a:p>
-              <a:p>
-                <a:r>
-                  <a:rPr lang="en-US" sz="1200" kern="1200" dirty="0">
-                    <a:solidFill>
-                      <a:schemeClr val="tx1"/>
-                    </a:solidFill>
-                    <a:effectLst/>
-                    <a:latin typeface="+mn-lt"/>
-                    <a:ea typeface="+mn-ea"/>
-                    <a:cs typeface="+mn-cs"/>
-                  </a:rPr>
-                  <a:t>Copyright and License information</a:t>
-                </a:r>
-              </a:p>
-              <a:p>
-                <a:r>
-                  <a:rPr lang="en-US" sz="1200" kern="1200" dirty="0">
-                    <a:solidFill>
-                      <a:schemeClr val="tx1"/>
-                    </a:solidFill>
-                    <a:effectLst/>
-                    <a:latin typeface="+mn-lt"/>
-                    <a:ea typeface="+mn-ea"/>
-                    <a:cs typeface="+mn-cs"/>
-                  </a:rPr>
-                  <a:t>PMCID: PMC5389077  PMID: </a:t>
-                </a:r>
-                <a:r>
-                  <a:rPr lang="en-US" sz="1200" u="sng" kern="1200" dirty="0">
-                    <a:solidFill>
-                      <a:schemeClr val="tx1"/>
-                    </a:solidFill>
-                    <a:effectLst/>
-                    <a:latin typeface="+mn-lt"/>
-                    <a:ea typeface="+mn-ea"/>
-                    <a:cs typeface="+mn-cs"/>
-                    <a:hlinkClick r:id="rId11"/>
-                  </a:rPr>
-                  <a:t>28450773</a:t>
-                </a:r>
-                <a:endParaRPr lang="en-US" sz="1200" kern="1200" dirty="0">
-                  <a:solidFill>
-                    <a:schemeClr val="tx1"/>
-                  </a:solidFill>
-                  <a:effectLst/>
-                  <a:latin typeface="+mn-lt"/>
-                  <a:ea typeface="+mn-ea"/>
-                  <a:cs typeface="+mn-cs"/>
-                </a:endParaRPr>
-              </a:p>
-              <a:p>
                 <a:endParaRPr lang="en-US" dirty="0"/>
               </a:p>
             </p:txBody>
@@ -2134,7 +1757,7 @@
           <a:p>
             <a:fld id="{73751BD0-6F40-8441-BA56-9EA644E5E3FB}" type="datetimeFigureOut">
               <a:rPr lang="en-US" smtClean="0"/>
-              <a:t>8/11/2026</a:t>
+              <a:t>8/14/2026</a:t>
             </a:fld>
             <a:endParaRPr lang="en-US" dirty="0"/>
           </a:p>
@@ -2332,7 +1955,7 @@
           <a:p>
             <a:fld id="{73751BD0-6F40-8441-BA56-9EA644E5E3FB}" type="datetimeFigureOut">
               <a:rPr lang="en-US" smtClean="0"/>
-              <a:t>8/11/2026</a:t>
+              <a:t>8/14/2026</a:t>
             </a:fld>
             <a:endParaRPr lang="en-US" dirty="0"/>
           </a:p>
@@ -2540,7 +2163,7 @@
           <a:p>
             <a:fld id="{73751BD0-6F40-8441-BA56-9EA644E5E3FB}" type="datetimeFigureOut">
               <a:rPr lang="en-US" smtClean="0"/>
-              <a:t>8/11/2026</a:t>
+              <a:t>8/14/2026</a:t>
             </a:fld>
             <a:endParaRPr lang="en-US" dirty="0"/>
           </a:p>
@@ -2738,7 +2361,7 @@
           <a:p>
             <a:fld id="{73751BD0-6F40-8441-BA56-9EA644E5E3FB}" type="datetimeFigureOut">
               <a:rPr lang="en-US" smtClean="0"/>
-              <a:t>8/11/2026</a:t>
+              <a:t>8/14/2026</a:t>
             </a:fld>
             <a:endParaRPr lang="en-US" dirty="0"/>
           </a:p>
@@ -3013,7 +2636,7 @@
           <a:p>
             <a:fld id="{73751BD0-6F40-8441-BA56-9EA644E5E3FB}" type="datetimeFigureOut">
               <a:rPr lang="en-US" smtClean="0"/>
-              <a:t>8/11/2026</a:t>
+              <a:t>8/14/2026</a:t>
             </a:fld>
             <a:endParaRPr lang="en-US" dirty="0"/>
           </a:p>
@@ -3278,7 +2901,7 @@
           <a:p>
             <a:fld id="{73751BD0-6F40-8441-BA56-9EA644E5E3FB}" type="datetimeFigureOut">
               <a:rPr lang="en-US" smtClean="0"/>
-              <a:t>8/11/2026</a:t>
+              <a:t>8/14/2026</a:t>
             </a:fld>
             <a:endParaRPr lang="en-US" dirty="0"/>
           </a:p>
@@ -3690,7 +3313,7 @@
           <a:p>
             <a:fld id="{73751BD0-6F40-8441-BA56-9EA644E5E3FB}" type="datetimeFigureOut">
               <a:rPr lang="en-US" smtClean="0"/>
-              <a:t>8/11/2026</a:t>
+              <a:t>8/14/2026</a:t>
             </a:fld>
             <a:endParaRPr lang="en-US" dirty="0"/>
           </a:p>
@@ -3831,7 +3454,7 @@
           <a:p>
             <a:fld id="{73751BD0-6F40-8441-BA56-9EA644E5E3FB}" type="datetimeFigureOut">
               <a:rPr lang="en-US" smtClean="0"/>
-              <a:t>8/11/2026</a:t>
+              <a:t>8/14/2026</a:t>
             </a:fld>
             <a:endParaRPr lang="en-US" dirty="0"/>
           </a:p>
@@ -3944,7 +3567,7 @@
           <a:p>
             <a:fld id="{73751BD0-6F40-8441-BA56-9EA644E5E3FB}" type="datetimeFigureOut">
               <a:rPr lang="en-US" smtClean="0"/>
-              <a:t>8/11/2026</a:t>
+              <a:t>8/14/2026</a:t>
             </a:fld>
             <a:endParaRPr lang="en-US" dirty="0"/>
           </a:p>
@@ -4255,7 +3878,7 @@
           <a:p>
             <a:fld id="{73751BD0-6F40-8441-BA56-9EA644E5E3FB}" type="datetimeFigureOut">
               <a:rPr lang="en-US" smtClean="0"/>
-              <a:t>8/11/2026</a:t>
+              <a:t>8/14/2026</a:t>
             </a:fld>
             <a:endParaRPr lang="en-US" dirty="0"/>
           </a:p>
@@ -4543,7 +4166,7 @@
           <a:p>
             <a:fld id="{73751BD0-6F40-8441-BA56-9EA644E5E3FB}" type="datetimeFigureOut">
               <a:rPr lang="en-US" smtClean="0"/>
-              <a:t>8/11/2026</a:t>
+              <a:t>8/14/2026</a:t>
             </a:fld>
             <a:endParaRPr lang="en-US" dirty="0"/>
           </a:p>
@@ -4784,7 +4407,7 @@
           <a:p>
             <a:fld id="{73751BD0-6F40-8441-BA56-9EA644E5E3FB}" type="datetimeFigureOut">
               <a:rPr lang="en-US" smtClean="0"/>
-              <a:t>8/11/2026</a:t>
+              <a:t>8/14/2026</a:t>
             </a:fld>
             <a:endParaRPr lang="en-US" dirty="0"/>
           </a:p>
@@ -6105,6 +5728,60 @@
                 <a:cs typeface="Times New Roman" panose="02020603050405020304" pitchFamily="18" charset="0"/>
               </a:rPr>
               <a:t>“Are you 100% sure I tore my meniscus?”</a:t>
+            </a:r>
+          </a:p>
+        </p:txBody>
+      </p:sp>
+      <p:sp>
+        <p:nvSpPr>
+          <p:cNvPr id="3" name="TextBox 2">
+            <a:extLst>
+              <a:ext uri="{FF2B5EF4-FFF2-40B4-BE49-F238E27FC236}">
+                <a16:creationId xmlns:a16="http://schemas.microsoft.com/office/drawing/2014/main" id="{6B6F2000-1142-22C3-F99B-98A5A1BD5B74}"/>
+              </a:ext>
+            </a:extLst>
+          </p:cNvPr>
+          <p:cNvSpPr txBox="1"/>
+          <p:nvPr/>
+        </p:nvSpPr>
+        <p:spPr>
+          <a:xfrm>
+            <a:off x="1476132" y="6400936"/>
+            <a:ext cx="9286806" cy="400110"/>
+          </a:xfrm>
+          <a:prstGeom prst="rect">
+            <a:avLst/>
+          </a:prstGeom>
+          <a:noFill/>
+        </p:spPr>
+        <p:txBody>
+          <a:bodyPr wrap="square" rtlCol="0">
+            <a:spAutoFit/>
+          </a:bodyPr>
+          <a:lstStyle/>
+          <a:p>
+            <a:pPr lvl="0">
+              <a:defRPr/>
+            </a:pPr>
+            <a:r>
+              <a:rPr lang="en-US" sz="1000" dirty="0"/>
+              <a:t>Data from Y. Gupta, D. Mahara, A. Lamichhane, "McMurray's Test and Joint Line Tenderness for Medial Meniscus Tear: Are They Accurate?," </a:t>
+            </a:r>
+            <a:r>
+              <a:rPr lang="en-US" sz="1000" i="1" dirty="0"/>
+              <a:t>Ethiopian Journal of Health Sciences</a:t>
+            </a:r>
+            <a:r>
+              <a:rPr lang="en-US" sz="1000" dirty="0"/>
+              <a:t> 26, no. 6 (2016): 567-572. </a:t>
+            </a:r>
+            <a:r>
+              <a:rPr lang="en-US" sz="1000" dirty="0" err="1"/>
+              <a:t>doi</a:t>
+            </a:r>
+            <a:r>
+              <a:rPr lang="en-US" sz="1000" dirty="0"/>
+              <a:t>: 10.4314/ejhs.v26i6.10</a:t>
             </a:r>
           </a:p>
         </p:txBody>
@@ -6709,6 +6386,60 @@
           </a:p>
         </p:txBody>
       </p:sp>
+      <p:sp>
+        <p:nvSpPr>
+          <p:cNvPr id="5" name="TextBox 4">
+            <a:extLst>
+              <a:ext uri="{FF2B5EF4-FFF2-40B4-BE49-F238E27FC236}">
+                <a16:creationId xmlns:a16="http://schemas.microsoft.com/office/drawing/2014/main" id="{3044B9E4-1F50-4532-4013-1AB13C4CD5B2}"/>
+              </a:ext>
+            </a:extLst>
+          </p:cNvPr>
+          <p:cNvSpPr txBox="1"/>
+          <p:nvPr/>
+        </p:nvSpPr>
+        <p:spPr>
+          <a:xfrm>
+            <a:off x="1617811" y="6404466"/>
+            <a:ext cx="9286806" cy="400110"/>
+          </a:xfrm>
+          <a:prstGeom prst="rect">
+            <a:avLst/>
+          </a:prstGeom>
+          <a:noFill/>
+        </p:spPr>
+        <p:txBody>
+          <a:bodyPr wrap="square" rtlCol="0">
+            <a:spAutoFit/>
+          </a:bodyPr>
+          <a:lstStyle/>
+          <a:p>
+            <a:pPr lvl="0">
+              <a:defRPr/>
+            </a:pPr>
+            <a:r>
+              <a:rPr lang="en-US" sz="1000" dirty="0"/>
+              <a:t>Data from Y. Gupta, D. Mahara, A. Lamichhane, "McMurray's Test and Joint Line Tenderness for Medial Meniscus Tear: Are They Accurate?," </a:t>
+            </a:r>
+            <a:r>
+              <a:rPr lang="en-US" sz="1000" i="1" dirty="0"/>
+              <a:t>Ethiopian Journal of Health Sciences</a:t>
+            </a:r>
+            <a:r>
+              <a:rPr lang="en-US" sz="1000" dirty="0"/>
+              <a:t> 26, no. 6 (2016): 567-572. </a:t>
+            </a:r>
+            <a:r>
+              <a:rPr lang="en-US" sz="1000" dirty="0" err="1"/>
+              <a:t>doi</a:t>
+            </a:r>
+            <a:r>
+              <a:rPr lang="en-US" sz="1000" dirty="0"/>
+              <a:t>: 10.4314/ejhs.v26i6.10</a:t>
+            </a:r>
+          </a:p>
+        </p:txBody>
+      </p:sp>
     </p:spTree>
     <p:extLst>
       <p:ext uri="{BB962C8B-B14F-4D97-AF65-F5344CB8AC3E}">
@@ -7330,6 +7061,60 @@
           </a:graphicData>
         </a:graphic>
       </p:graphicFrame>
+      <p:sp>
+        <p:nvSpPr>
+          <p:cNvPr id="5" name="TextBox 4">
+            <a:extLst>
+              <a:ext uri="{FF2B5EF4-FFF2-40B4-BE49-F238E27FC236}">
+                <a16:creationId xmlns:a16="http://schemas.microsoft.com/office/drawing/2014/main" id="{A87734D2-C79B-70E4-D7EA-4F09E5039721}"/>
+              </a:ext>
+            </a:extLst>
+          </p:cNvPr>
+          <p:cNvSpPr txBox="1"/>
+          <p:nvPr/>
+        </p:nvSpPr>
+        <p:spPr>
+          <a:xfrm>
+            <a:off x="1617811" y="6091296"/>
+            <a:ext cx="8956377" cy="400110"/>
+          </a:xfrm>
+          <a:prstGeom prst="rect">
+            <a:avLst/>
+          </a:prstGeom>
+          <a:noFill/>
+        </p:spPr>
+        <p:txBody>
+          <a:bodyPr wrap="square" rtlCol="0">
+            <a:spAutoFit/>
+          </a:bodyPr>
+          <a:lstStyle/>
+          <a:p>
+            <a:pPr lvl="0">
+              <a:defRPr/>
+            </a:pPr>
+            <a:r>
+              <a:rPr lang="en-US" sz="1000" dirty="0"/>
+              <a:t>Data from Y. Gupta, D. Mahara, A. Lamichhane, "McMurray's Test and Joint Line Tenderness for Medial Meniscus Tear: Are They Accurate?," </a:t>
+            </a:r>
+            <a:r>
+              <a:rPr lang="en-US" sz="1000" i="1" dirty="0"/>
+              <a:t>Ethiopian Journal of Health Sciences</a:t>
+            </a:r>
+            <a:r>
+              <a:rPr lang="en-US" sz="1000" dirty="0"/>
+              <a:t> 26, no. 6 (2016): 567-572. </a:t>
+            </a:r>
+            <a:r>
+              <a:rPr lang="en-US" sz="1000" dirty="0" err="1"/>
+              <a:t>doi</a:t>
+            </a:r>
+            <a:r>
+              <a:rPr lang="en-US" sz="1000" dirty="0"/>
+              <a:t>: 10.4314/ejhs.v26i6.10</a:t>
+            </a:r>
+          </a:p>
+        </p:txBody>
+      </p:sp>
     </p:spTree>
     <p:extLst>
       <p:ext uri="{BB962C8B-B14F-4D97-AF65-F5344CB8AC3E}">
@@ -7884,6 +7669,60 @@
           </a:graphicData>
         </a:graphic>
       </p:graphicFrame>
+      <p:sp>
+        <p:nvSpPr>
+          <p:cNvPr id="5" name="TextBox 4">
+            <a:extLst>
+              <a:ext uri="{FF2B5EF4-FFF2-40B4-BE49-F238E27FC236}">
+                <a16:creationId xmlns:a16="http://schemas.microsoft.com/office/drawing/2014/main" id="{4480373E-164D-3E1D-60B2-71E7AABEC2AB}"/>
+              </a:ext>
+            </a:extLst>
+          </p:cNvPr>
+          <p:cNvSpPr txBox="1"/>
+          <p:nvPr/>
+        </p:nvSpPr>
+        <p:spPr>
+          <a:xfrm>
+            <a:off x="1693954" y="5545681"/>
+            <a:ext cx="8729142" cy="400110"/>
+          </a:xfrm>
+          <a:prstGeom prst="rect">
+            <a:avLst/>
+          </a:prstGeom>
+          <a:noFill/>
+        </p:spPr>
+        <p:txBody>
+          <a:bodyPr wrap="square" rtlCol="0">
+            <a:spAutoFit/>
+          </a:bodyPr>
+          <a:lstStyle/>
+          <a:p>
+            <a:pPr lvl="0">
+              <a:defRPr/>
+            </a:pPr>
+            <a:r>
+              <a:rPr lang="en-US" sz="1000" dirty="0"/>
+              <a:t>Data from Y. Gupta, D. Mahara, A. Lamichhane, "McMurray's Test and Joint Line Tenderness for Medial Meniscus Tear: Are They Accurate?," </a:t>
+            </a:r>
+            <a:r>
+              <a:rPr lang="en-US" sz="1000" i="1" dirty="0"/>
+              <a:t>Ethiopian Journal of Health Sciences</a:t>
+            </a:r>
+            <a:r>
+              <a:rPr lang="en-US" sz="1000" dirty="0"/>
+              <a:t> 26, no. 6 (2016): 567-572. </a:t>
+            </a:r>
+            <a:r>
+              <a:rPr lang="en-US" sz="1000" dirty="0" err="1"/>
+              <a:t>doi</a:t>
+            </a:r>
+            <a:r>
+              <a:rPr lang="en-US" sz="1000" dirty="0"/>
+              <a:t>: 10.4314/ejhs.v26i6.10</a:t>
+            </a:r>
+          </a:p>
+        </p:txBody>
+      </p:sp>
     </p:spTree>
     <p:extLst>
       <p:ext uri="{BB962C8B-B14F-4D97-AF65-F5344CB8AC3E}">
